--- a/data/employees/EMP043/AST-EMP043-01.pptx
+++ b/data/employees/EMP043/AST-EMP043-01.pptx
@@ -9,6 +9,7 @@
     <p:sldId id="257" r:id="rId8"/>
     <p:sldId id="258" r:id="rId9"/>
     <p:sldId id="259" r:id="rId10"/>
+    <p:sldId id="260" r:id="rId11"/>
   </p:sldIdLst>
   <p:sldSz cx="9144000" cy="6858000" type="screen4x3"/>
   <p:notesSz cx="6858000" cy="9144000"/>
@@ -3098,42 +3099,55 @@
             <a:spLocks noGrp="1"/>
           </p:cNvSpPr>
           <p:nvPr>
-            <p:ph type="ctrTitle"/>
-          </p:nvPr>
-        </p:nvSpPr>
-        <p:spPr/>
-        <p:txBody>
-          <a:bodyPr/>
-          <a:lstStyle/>
-          <a:p>
-            <a:r>
-              <a:t>Project update deck - EMP043</a:t>
-            </a:r>
-          </a:p>
-        </p:txBody>
-      </p:sp>
-      <p:sp>
-        <p:nvSpPr>
-          <p:cNvPr id="3" name="Subtitle 2"/>
-          <p:cNvSpPr>
-            <a:spLocks noGrp="1"/>
-          </p:cNvSpPr>
-          <p:nvPr>
-            <p:ph type="subTitle" idx="1"/>
-          </p:nvPr>
-        </p:nvSpPr>
-        <p:spPr/>
-        <p:txBody>
-          <a:bodyPr/>
-          <a:lstStyle/>
-          <a:p>
-            <a:r>
-              <a:t>Taylor Miller | Lead | IT</a:t>
-            </a:r>
-          </a:p>
-          <a:p>
-            <a:r>
-              <a:t>Prepared: 2025-02-14</a:t>
+            <p:ph type="title"/>
+          </p:nvPr>
+        </p:nvSpPr>
+        <p:spPr/>
+        <p:txBody>
+          <a:bodyPr/>
+          <a:lstStyle/>
+          <a:p>
+            <a:r>
+              <a:t>Ast Emp043 01 - EMP043</a:t>
+            </a:r>
+          </a:p>
+        </p:txBody>
+      </p:sp>
+      <p:sp>
+        <p:nvSpPr>
+          <p:cNvPr id="3" name="Content Placeholder 2"/>
+          <p:cNvSpPr>
+            <a:spLocks noGrp="1"/>
+          </p:cNvSpPr>
+          <p:nvPr>
+            <p:ph idx="1"/>
+          </p:nvPr>
+        </p:nvSpPr>
+        <p:spPr/>
+        <p:txBody>
+          <a:bodyPr/>
+          <a:lstStyle/>
+          <a:p>
+            <a:r>
+              <a:t>Slide 1: Executive Summary</a:t>
+            </a:r>
+          </a:p>
+          <a:p>
+            <a:pPr lvl="1"/>
+            <a:r>
+              <a:t>Section 1: Department KPI performance. EMP043 contributes to ast emp043 01 through recurring collaboration, clear ownership boundaries, and measurable outcomes. The team captures decisions, open issues, and handoffs so that knowledge remains discoverable for future programs.</a:t>
+            </a:r>
+          </a:p>
+          <a:p>
+            <a:pPr lvl="1"/>
+            <a:r>
+              <a:t>Section 2: Automation backlog refinement. EMP043 contributes to ast emp043 01 through recurring collaboration, clear ownership boundaries, and measurable outcomes. The team captures decisions, open issues, and handoffs so that knowledge remains discoverable for future programs.</a:t>
+            </a:r>
+          </a:p>
+          <a:p>
+            <a:pPr lvl="1"/>
+            <a:r>
+              <a:t>Section 3: Operational risk review. EMP043 contributes to ast emp043 01 through recurring collaboration, clear ownership boundaries, and measurable outcomes. The team captures decisions, open issues, and handoffs so that knowledge remains discoverable for future programs.</a:t>
             </a:r>
           </a:p>
         </p:txBody>
@@ -3172,7 +3186,7 @@
           <a:lstStyle/>
           <a:p>
             <a:r>
-              <a:t>Infrastructure Utilisation Dashboard</a:t>
+              <a:t>Ast Emp043 01 - EMP043</a:t>
             </a:r>
           </a:p>
         </p:txBody>
@@ -3193,17 +3207,25 @@
           <a:lstStyle/>
           <a:p>
             <a:r>
-              <a:t>Overview of Infrastructure Utilisation Dashboard for IT department.</a:t>
-            </a:r>
-          </a:p>
-          <a:p>
-            <a:r>
-              <a:t>Responsible: Taylor Miller (Lead)</a:t>
-            </a:r>
-          </a:p>
-          <a:p>
-            <a:r>
-              <a:t>Location: Hsinchu | Skills: Synapse, Ontology, MLOps, Azure AI</a:t>
+              <a:t>Slide 2: Executive Summary</a:t>
+            </a:r>
+          </a:p>
+          <a:p>
+            <a:pPr lvl="1"/>
+            <a:r>
+              <a:t>Section 1: Operational risk review. EMP043 contributes to ast emp043 01 through recurring collaboration, clear ownership boundaries, and measurable outcomes. The team captures decisions, open issues, and handoffs so that knowledge remains discoverable for future programs.</a:t>
+            </a:r>
+          </a:p>
+          <a:p>
+            <a:pPr lvl="1"/>
+            <a:r>
+              <a:t>Section 2: Department KPI performance. EMP043 contributes to ast emp043 01 through recurring collaboration, clear ownership boundaries, and measurable outcomes. The team captures decisions, open issues, and handoffs so that knowledge remains discoverable for future programs.</a:t>
+            </a:r>
+          </a:p>
+          <a:p>
+            <a:pPr lvl="1"/>
+            <a:r>
+              <a:t>Section 3: Customer escalation analysis. EMP043 contributes to ast emp043 01 through recurring collaboration, clear ownership boundaries, and measurable outcomes. The team captures decisions, open issues, and handoffs so that knowledge remains discoverable for future programs.</a:t>
             </a:r>
           </a:p>
         </p:txBody>
@@ -3242,7 +3264,7 @@
           <a:lstStyle/>
           <a:p>
             <a:r>
-              <a:t>Security Patch Status</a:t>
+              <a:t>Ast Emp043 01 - EMP043</a:t>
             </a:r>
           </a:p>
         </p:txBody>
@@ -3263,17 +3285,25 @@
           <a:lstStyle/>
           <a:p>
             <a:r>
-              <a:t>Overview of Security Patch Status for IT department.</a:t>
-            </a:r>
-          </a:p>
-          <a:p>
-            <a:r>
-              <a:t>Responsible: Taylor Miller (Lead)</a:t>
-            </a:r>
-          </a:p>
-          <a:p>
-            <a:r>
-              <a:t>Location: Hsinchu | Skills: Synapse, Ontology, MLOps, Azure AI</a:t>
+              <a:t>Slide 3: Executive Summary</a:t>
+            </a:r>
+          </a:p>
+          <a:p>
+            <a:pPr lvl="1"/>
+            <a:r>
+              <a:t>Section 1: Customer escalation analysis. EMP043 contributes to ast emp043 01 through recurring collaboration, clear ownership boundaries, and measurable outcomes. The team captures decisions, open issues, and handoffs so that knowledge remains discoverable for future programs.</a:t>
+            </a:r>
+          </a:p>
+          <a:p>
+            <a:pPr lvl="1"/>
+            <a:r>
+              <a:t>Section 2: Operational risk review. EMP043 contributes to ast emp043 01 through recurring collaboration, clear ownership boundaries, and measurable outcomes. The team captures decisions, open issues, and handoffs so that knowledge remains discoverable for future programs.</a:t>
+            </a:r>
+          </a:p>
+          <a:p>
+            <a:pPr lvl="1"/>
+            <a:r>
+              <a:t>Section 3: Automation backlog refinement. EMP043 contributes to ast emp043 01 through recurring collaboration, clear ownership boundaries, and measurable outcomes. The team captures decisions, open issues, and handoffs so that knowledge remains discoverable for future programs.</a:t>
             </a:r>
           </a:p>
         </p:txBody>
@@ -3312,7 +3342,7 @@
           <a:lstStyle/>
           <a:p>
             <a:r>
-              <a:t>Cloud Cost Optimisation</a:t>
+              <a:t>Ast Emp043 01 - EMP043</a:t>
             </a:r>
           </a:p>
         </p:txBody>
@@ -3333,17 +3363,103 @@
           <a:lstStyle/>
           <a:p>
             <a:r>
-              <a:t>Overview of Cloud Cost Optimisation for IT department.</a:t>
-            </a:r>
-          </a:p>
-          <a:p>
-            <a:r>
-              <a:t>Responsible: Taylor Miller (Lead)</a:t>
-            </a:r>
-          </a:p>
-          <a:p>
-            <a:r>
-              <a:t>Location: Hsinchu | Skills: Synapse, Ontology, MLOps, Azure AI</a:t>
+              <a:t>Slide 4: Executive Summary</a:t>
+            </a:r>
+          </a:p>
+          <a:p>
+            <a:pPr lvl="1"/>
+            <a:r>
+              <a:t>Section 1: Department KPI performance. EMP043 contributes to ast emp043 01 through recurring collaboration, clear ownership boundaries, and measurable outcomes. The team captures decisions, open issues, and handoffs so that knowledge remains discoverable for future programs.</a:t>
+            </a:r>
+          </a:p>
+          <a:p>
+            <a:pPr lvl="1"/>
+            <a:r>
+              <a:t>Section 2: Department KPI performance. EMP043 contributes to ast emp043 01 through recurring collaboration, clear ownership boundaries, and measurable outcomes. The team captures decisions, open issues, and handoffs so that knowledge remains discoverable for future programs.</a:t>
+            </a:r>
+          </a:p>
+          <a:p>
+            <a:pPr lvl="1"/>
+            <a:r>
+              <a:t>Section 3: Department KPI performance. EMP043 contributes to ast emp043 01 through recurring collaboration, clear ownership boundaries, and measurable outcomes. The team captures decisions, open issues, and handoffs so that knowledge remains discoverable for future programs.</a:t>
+            </a:r>
+          </a:p>
+        </p:txBody>
+      </p:sp>
+    </p:spTree>
+  </p:cSld>
+  <p:clrMapOvr>
+    <a:masterClrMapping/>
+  </p:clrMapOvr>
+</p:sld>
+</file>
+
+<file path=ppt/slides/slide5.xml><?xml version="1.0" encoding="utf-8"?>
+<p:sld xmlns:a="http://schemas.openxmlformats.org/drawingml/2006/main" xmlns:p="http://schemas.openxmlformats.org/presentationml/2006/main" xmlns:r="http://schemas.openxmlformats.org/officeDocument/2006/relationships">
+  <p:cSld>
+    <p:spTree>
+      <p:nvGrpSpPr>
+        <p:cNvPr id="1" name=""/>
+        <p:cNvGrpSpPr/>
+        <p:nvPr/>
+      </p:nvGrpSpPr>
+      <p:grpSpPr/>
+      <p:sp>
+        <p:nvSpPr>
+          <p:cNvPr id="2" name="Title 1"/>
+          <p:cNvSpPr>
+            <a:spLocks noGrp="1"/>
+          </p:cNvSpPr>
+          <p:nvPr>
+            <p:ph type="title"/>
+          </p:nvPr>
+        </p:nvSpPr>
+        <p:spPr/>
+        <p:txBody>
+          <a:bodyPr/>
+          <a:lstStyle/>
+          <a:p>
+            <a:r>
+              <a:t>Ast Emp043 01 - EMP043</a:t>
+            </a:r>
+          </a:p>
+        </p:txBody>
+      </p:sp>
+      <p:sp>
+        <p:nvSpPr>
+          <p:cNvPr id="3" name="Content Placeholder 2"/>
+          <p:cNvSpPr>
+            <a:spLocks noGrp="1"/>
+          </p:cNvSpPr>
+          <p:nvPr>
+            <p:ph idx="1"/>
+          </p:nvPr>
+        </p:nvSpPr>
+        <p:spPr/>
+        <p:txBody>
+          <a:bodyPr/>
+          <a:lstStyle/>
+          <a:p>
+            <a:r>
+              <a:t>Slide 5: Executive Summary</a:t>
+            </a:r>
+          </a:p>
+          <a:p>
+            <a:pPr lvl="1"/>
+            <a:r>
+              <a:t>Section 1: Customer escalation analysis. EMP043 contributes to ast emp043 01 through recurring collaboration, clear ownership boundaries, and measurable outcomes. The team captures decisions, open issues, and handoffs so that knowledge remains discoverable for future programs.</a:t>
+            </a:r>
+          </a:p>
+          <a:p>
+            <a:pPr lvl="1"/>
+            <a:r>
+              <a:t>Section 2: Operational risk review. EMP043 contributes to ast emp043 01 through recurring collaboration, clear ownership boundaries, and measurable outcomes. The team captures decisions, open issues, and handoffs so that knowledge remains discoverable for future programs.</a:t>
+            </a:r>
+          </a:p>
+          <a:p>
+            <a:pPr lvl="1"/>
+            <a:r>
+              <a:t>Section 3: Fabric semantic model planning. EMP043 contributes to ast emp043 01 through recurring collaboration, clear ownership boundaries, and measurable outcomes. The team captures decisions, open issues, and handoffs so that knowledge remains discoverable for future programs.</a:t>
             </a:r>
           </a:p>
         </p:txBody>
